--- a/resources/presentations/Lunch-Is-Packed-Module-02-textiles-around-us.pptx
+++ b/resources/presentations/Lunch-Is-Packed-Module-02-textiles-around-us.pptx
@@ -2,20 +2,20 @@
 <file path=ppt/presentation.xml><?xml version="1.0" encoding="utf-8"?>
 <p:presentation xmlns:p="http://schemas.openxmlformats.org/presentationml/2006/main">
   <p:sldMasterIdLst>
-    <p:sldMasterId xmlns:r="http://schemas.openxmlformats.org/officeDocument/2006/relationships" id="2147483648" r:id="R90feca54123d4016"/>
+    <p:sldMasterId xmlns:r="http://schemas.openxmlformats.org/officeDocument/2006/relationships" id="2147483648" r:id="R4a77224db07f4cef"/>
   </p:sldMasterIdLst>
   <p:notesMasterIdLst>
-    <p:notesMasterId xmlns:r="http://schemas.openxmlformats.org/officeDocument/2006/relationships" r:id="R37182324ebb44ec4"/>
+    <p:notesMasterId xmlns:r="http://schemas.openxmlformats.org/officeDocument/2006/relationships" r:id="Rf85d6d2c242e403d"/>
   </p:notesMasterIdLst>
   <p:sldIdLst>
-    <p:sldId xmlns:r="http://schemas.openxmlformats.org/officeDocument/2006/relationships" id="256" r:id="R43b16f82ed454b30"/>
-    <p:sldId xmlns:r="http://schemas.openxmlformats.org/officeDocument/2006/relationships" id="257" r:id="R2073898a64d14587"/>
-    <p:sldId xmlns:r="http://schemas.openxmlformats.org/officeDocument/2006/relationships" id="258" r:id="R9182ed9500064795"/>
-    <p:sldId xmlns:r="http://schemas.openxmlformats.org/officeDocument/2006/relationships" id="259" r:id="R5c93cfecd6d144dd"/>
-    <p:sldId xmlns:r="http://schemas.openxmlformats.org/officeDocument/2006/relationships" id="260" r:id="R3e53d41edd284c3e"/>
-    <p:sldId xmlns:r="http://schemas.openxmlformats.org/officeDocument/2006/relationships" id="261" r:id="R463d7d7a73714299"/>
-    <p:sldId xmlns:r="http://schemas.openxmlformats.org/officeDocument/2006/relationships" id="262" r:id="R87d6a3cdd4d44116"/>
-    <p:sldId xmlns:r="http://schemas.openxmlformats.org/officeDocument/2006/relationships" id="263" r:id="Rcf06f82459cc4650"/>
+    <p:sldId xmlns:r="http://schemas.openxmlformats.org/officeDocument/2006/relationships" id="256" r:id="Re7383212ebad4b8a"/>
+    <p:sldId xmlns:r="http://schemas.openxmlformats.org/officeDocument/2006/relationships" id="257" r:id="R3cb3fd0b2e604cdf"/>
+    <p:sldId xmlns:r="http://schemas.openxmlformats.org/officeDocument/2006/relationships" id="258" r:id="R6a4355f90f3a4fdf"/>
+    <p:sldId xmlns:r="http://schemas.openxmlformats.org/officeDocument/2006/relationships" id="259" r:id="R042833319f0646cb"/>
+    <p:sldId xmlns:r="http://schemas.openxmlformats.org/officeDocument/2006/relationships" id="260" r:id="R7b1121a66e144f25"/>
+    <p:sldId xmlns:r="http://schemas.openxmlformats.org/officeDocument/2006/relationships" id="261" r:id="Re8ccbbef2a1c4386"/>
+    <p:sldId xmlns:r="http://schemas.openxmlformats.org/officeDocument/2006/relationships" id="262" r:id="R4a987d8b48e14d4b"/>
+    <p:sldId xmlns:r="http://schemas.openxmlformats.org/officeDocument/2006/relationships" id="263" r:id="R1adec6a3a2204780"/>
   </p:sldIdLst>
   <p:sldSz cx="12192000" cy="6858000"/>
   <p:notesSz cx="6858000" cy="9144000"/>
@@ -1127,7 +1127,7 @@
   </p:cSld>
   <p:clrMap bg1="lt1" tx1="dk1" bg2="lt2" tx2="dk2" accent1="accent1" accent2="accent2" accent3="accent3" accent4="accent4" accent5="accent5" accent6="accent6" hlink="hlink" folHlink="folHlink"/>
   <p:sldLayoutIdLst>
-    <p:sldLayoutId xmlns:r="http://schemas.openxmlformats.org/officeDocument/2006/relationships" id="2147483649" r:id="Rec1bd75f88fc45eb"/>
+    <p:sldLayoutId xmlns:r="http://schemas.openxmlformats.org/officeDocument/2006/relationships" id="2147483649" r:id="R0707c81e0cda44f2"/>
   </p:sldLayoutIdLst>
   <p:txStyles>
     <p:titleStyle>
@@ -1678,7 +1678,7 @@
           <p:cNvPr id="7" name="title-plane">
             <a:extLst xmlns:a="http://schemas.openxmlformats.org/drawingml/2006/main">
               <a:ext uri="{FF2B5EF4-FFF2-40B4-BE49-F238E27FC236}">
-                <a16:creationId xmlns:a16="http://schemas.microsoft.com/office/drawing/2014/main" id="{08299C03-26CF-4BB7-9F97-88E02F1F458C}"/>
+                <a16:creationId xmlns:a16="http://schemas.microsoft.com/office/drawing/2014/main" id="{C33C26A8-C3E9-48E9-BDC4-9C09A5C1FBF3}"/>
               </a:ext>
             </a:extLst>
           </p:cNvPr>
@@ -1713,8 +1713,8 @@
           <p:nvPr/>
         </p:nvPicPr>
         <p:blipFill>
-          <a:blip xmlns:r="http://schemas.openxmlformats.org/officeDocument/2006/relationships" xmlns:a="http://schemas.openxmlformats.org/drawingml/2006/main" r:embed="Rafb723ee94c2480e"/>
-          <a:srcRect xmlns:a="http://schemas.openxmlformats.org/drawingml/2006/main" l="30134" t="0" r="30134" b="0"/>
+          <a:blip xmlns:r="http://schemas.openxmlformats.org/officeDocument/2006/relationships" xmlns:a="http://schemas.openxmlformats.org/drawingml/2006/main" r:embed="R4140ec7937594d92"/>
+          <a:srcRect xmlns:a="http://schemas.openxmlformats.org/drawingml/2006/main" l="24074" t="0" r="24074" b="0"/>
           <a:stretch xmlns:a="http://schemas.openxmlformats.org/drawingml/2006/main">
             <a:fillRect l="0" t="0" r="0" b="0"/>
           </a:stretch>
@@ -1734,7 +1734,7 @@
           <p:cNvPr id="3" name="module-kicker">
             <a:extLst xmlns:a="http://schemas.openxmlformats.org/drawingml/2006/main">
               <a:ext uri="{FF2B5EF4-FFF2-40B4-BE49-F238E27FC236}">
-                <a16:creationId xmlns:a16="http://schemas.microsoft.com/office/drawing/2014/main" id="{E8406035-D6B3-48F4-B6C9-4CFA733E63BE}"/>
+                <a16:creationId xmlns:a16="http://schemas.microsoft.com/office/drawing/2014/main" id="{34B2D196-48E2-4881-BBC2-5F19C42EB680}"/>
               </a:ext>
             </a:extLst>
           </p:cNvPr>
@@ -1784,7 +1784,7 @@
           <p:cNvPr id="4" name="deck-title">
             <a:extLst xmlns:a="http://schemas.openxmlformats.org/drawingml/2006/main">
               <a:ext uri="{FF2B5EF4-FFF2-40B4-BE49-F238E27FC236}">
-                <a16:creationId xmlns:a16="http://schemas.microsoft.com/office/drawing/2014/main" id="{1FA11947-23DD-4908-8C8A-B83486D2C9CA}"/>
+                <a16:creationId xmlns:a16="http://schemas.microsoft.com/office/drawing/2014/main" id="{BD783A13-AC0F-406C-B21B-780F62D7FC4A}"/>
               </a:ext>
             </a:extLst>
           </p:cNvPr>
@@ -1834,7 +1834,7 @@
           <p:cNvPr id="5" name="deck-subtitle">
             <a:extLst xmlns:a="http://schemas.openxmlformats.org/drawingml/2006/main">
               <a:ext uri="{FF2B5EF4-FFF2-40B4-BE49-F238E27FC236}">
-                <a16:creationId xmlns:a16="http://schemas.microsoft.com/office/drawing/2014/main" id="{36B0E9A5-7D72-4315-BED3-C851AD4EF189}"/>
+                <a16:creationId xmlns:a16="http://schemas.microsoft.com/office/drawing/2014/main" id="{CDBA1449-DE6F-4F97-B581-51C14F85A536}"/>
               </a:ext>
             </a:extLst>
           </p:cNvPr>
@@ -1884,7 +1884,7 @@
           <p:cNvPr id="6" name="deck-footer">
             <a:extLst xmlns:a="http://schemas.openxmlformats.org/drawingml/2006/main">
               <a:ext uri="{FF2B5EF4-FFF2-40B4-BE49-F238E27FC236}">
-                <a16:creationId xmlns:a16="http://schemas.microsoft.com/office/drawing/2014/main" id="{99073C0D-A1A9-4CA9-9129-1DE24E304F72}"/>
+                <a16:creationId xmlns:a16="http://schemas.microsoft.com/office/drawing/2014/main" id="{186DD962-4771-457F-A917-995F87E5057F}"/>
               </a:ext>
             </a:extLst>
           </p:cNvPr>
@@ -1932,7 +1932,7 @@
     </p:spTree>
     <p:extLst>
       <p:ext uri="{BB962C8B-B14F-4D97-AF65-F5344CB8AC3E}">
-        <p14:creationId xmlns:p14="http://schemas.microsoft.com/office/powerpoint/2010/main" val="1198508827"/>
+        <p14:creationId xmlns:p14="http://schemas.microsoft.com/office/powerpoint/2010/main" val="1642510319"/>
       </p:ext>
     </p:extLst>
   </p:cSld>
@@ -1963,7 +1963,7 @@
           <p:cNvPr id="15" name="top-rule">
             <a:extLst xmlns:a="http://schemas.openxmlformats.org/drawingml/2006/main">
               <a:ext uri="{FF2B5EF4-FFF2-40B4-BE49-F238E27FC236}">
-                <a16:creationId xmlns:a16="http://schemas.microsoft.com/office/drawing/2014/main" id="{674DC7DB-F356-407D-881A-329F2937F91D}"/>
+                <a16:creationId xmlns:a16="http://schemas.microsoft.com/office/drawing/2014/main" id="{9A083B95-EC8E-4225-B852-02B3C4297D33}"/>
               </a:ext>
             </a:extLst>
           </p:cNvPr>
@@ -1994,7 +1994,7 @@
           <p:cNvPr id="2" name="course-label">
             <a:extLst xmlns:a="http://schemas.openxmlformats.org/drawingml/2006/main">
               <a:ext uri="{FF2B5EF4-FFF2-40B4-BE49-F238E27FC236}">
-                <a16:creationId xmlns:a16="http://schemas.microsoft.com/office/drawing/2014/main" id="{EE2B64A8-B524-4084-AB91-E9DB9E5E95EF}"/>
+                <a16:creationId xmlns:a16="http://schemas.microsoft.com/office/drawing/2014/main" id="{C92A6ECE-CD0B-4422-A585-084457D718B9}"/>
               </a:ext>
             </a:extLst>
           </p:cNvPr>
@@ -2044,7 +2044,7 @@
           <p:cNvPr id="3" name="module-label">
             <a:extLst xmlns:a="http://schemas.openxmlformats.org/drawingml/2006/main">
               <a:ext uri="{FF2B5EF4-FFF2-40B4-BE49-F238E27FC236}">
-                <a16:creationId xmlns:a16="http://schemas.microsoft.com/office/drawing/2014/main" id="{9E6738D9-5931-4643-97B5-DE8FB54CC4D1}"/>
+                <a16:creationId xmlns:a16="http://schemas.microsoft.com/office/drawing/2014/main" id="{2AF439A1-FF1D-456D-AF09-F74EAB690BBD}"/>
               </a:ext>
             </a:extLst>
           </p:cNvPr>
@@ -2094,7 +2094,7 @@
           <p:cNvPr id="4" name="slide-title">
             <a:extLst xmlns:a="http://schemas.openxmlformats.org/drawingml/2006/main">
               <a:ext uri="{FF2B5EF4-FFF2-40B4-BE49-F238E27FC236}">
-                <a16:creationId xmlns:a16="http://schemas.microsoft.com/office/drawing/2014/main" id="{8946BBC4-E154-4E94-9E8F-630CA7AFCDD1}"/>
+                <a16:creationId xmlns:a16="http://schemas.microsoft.com/office/drawing/2014/main" id="{DE196732-516E-45A0-BE1A-C57770598A37}"/>
               </a:ext>
             </a:extLst>
           </p:cNvPr>
@@ -2144,7 +2144,7 @@
           <p:cNvPr id="5" name="slide-subtitle">
             <a:extLst xmlns:a="http://schemas.openxmlformats.org/drawingml/2006/main">
               <a:ext uri="{FF2B5EF4-FFF2-40B4-BE49-F238E27FC236}">
-                <a16:creationId xmlns:a16="http://schemas.microsoft.com/office/drawing/2014/main" id="{6EA9DE4D-6809-4C69-83AE-CDAEE22B0C60}"/>
+                <a16:creationId xmlns:a16="http://schemas.microsoft.com/office/drawing/2014/main" id="{AF937F36-4A25-44C8-817D-8DB4EFEEFA8F}"/>
               </a:ext>
             </a:extLst>
           </p:cNvPr>
@@ -2194,7 +2194,7 @@
           <p:cNvPr id="6" name="bullet-1">
             <a:extLst xmlns:a="http://schemas.openxmlformats.org/drawingml/2006/main">
               <a:ext uri="{FF2B5EF4-FFF2-40B4-BE49-F238E27FC236}">
-                <a16:creationId xmlns:a16="http://schemas.microsoft.com/office/drawing/2014/main" id="{CD40C4D9-420F-4670-B5C3-9C8D2E3BBA27}"/>
+                <a16:creationId xmlns:a16="http://schemas.microsoft.com/office/drawing/2014/main" id="{120AE011-4B09-4AD8-AE07-44DA2AAF5F70}"/>
               </a:ext>
             </a:extLst>
           </p:cNvPr>
@@ -2225,7 +2225,7 @@
           <p:cNvPr id="7" name="bullet-number-1">
             <a:extLst xmlns:a="http://schemas.openxmlformats.org/drawingml/2006/main">
               <a:ext uri="{FF2B5EF4-FFF2-40B4-BE49-F238E27FC236}">
-                <a16:creationId xmlns:a16="http://schemas.microsoft.com/office/drawing/2014/main" id="{79247829-2BC5-4153-9EF0-CEA88D732179}"/>
+                <a16:creationId xmlns:a16="http://schemas.microsoft.com/office/drawing/2014/main" id="{8856435F-D3EC-48F2-B464-C050F6A4AC7A}"/>
               </a:ext>
             </a:extLst>
           </p:cNvPr>
@@ -2275,7 +2275,7 @@
           <p:cNvPr id="8" name="bullet-copy-1">
             <a:extLst xmlns:a="http://schemas.openxmlformats.org/drawingml/2006/main">
               <a:ext uri="{FF2B5EF4-FFF2-40B4-BE49-F238E27FC236}">
-                <a16:creationId xmlns:a16="http://schemas.microsoft.com/office/drawing/2014/main" id="{C0DF7E56-ACDA-4558-88F4-724749617E29}"/>
+                <a16:creationId xmlns:a16="http://schemas.microsoft.com/office/drawing/2014/main" id="{15A6AD72-1761-482A-A8E8-67FD8F6B57C2}"/>
               </a:ext>
             </a:extLst>
           </p:cNvPr>
@@ -2325,7 +2325,7 @@
           <p:cNvPr id="9" name="bullet-2">
             <a:extLst xmlns:a="http://schemas.openxmlformats.org/drawingml/2006/main">
               <a:ext uri="{FF2B5EF4-FFF2-40B4-BE49-F238E27FC236}">
-                <a16:creationId xmlns:a16="http://schemas.microsoft.com/office/drawing/2014/main" id="{5E8711FE-1CDC-4C9F-941B-B02DE7F91190}"/>
+                <a16:creationId xmlns:a16="http://schemas.microsoft.com/office/drawing/2014/main" id="{969482CF-5876-457D-9F35-E065951A1959}"/>
               </a:ext>
             </a:extLst>
           </p:cNvPr>
@@ -2356,7 +2356,7 @@
           <p:cNvPr id="10" name="bullet-number-2">
             <a:extLst xmlns:a="http://schemas.openxmlformats.org/drawingml/2006/main">
               <a:ext uri="{FF2B5EF4-FFF2-40B4-BE49-F238E27FC236}">
-                <a16:creationId xmlns:a16="http://schemas.microsoft.com/office/drawing/2014/main" id="{6D965EB0-CAC6-4923-AF33-F0BCD632616E}"/>
+                <a16:creationId xmlns:a16="http://schemas.microsoft.com/office/drawing/2014/main" id="{A139F9FF-3C96-496C-ADFB-BA1804182E31}"/>
               </a:ext>
             </a:extLst>
           </p:cNvPr>
@@ -2406,7 +2406,7 @@
           <p:cNvPr id="11" name="bullet-copy-2">
             <a:extLst xmlns:a="http://schemas.openxmlformats.org/drawingml/2006/main">
               <a:ext uri="{FF2B5EF4-FFF2-40B4-BE49-F238E27FC236}">
-                <a16:creationId xmlns:a16="http://schemas.microsoft.com/office/drawing/2014/main" id="{33F47F45-DD89-467D-8036-8A63754C1BE8}"/>
+                <a16:creationId xmlns:a16="http://schemas.microsoft.com/office/drawing/2014/main" id="{9CBBE051-C06E-44C1-B597-F4C1E9B93C7F}"/>
               </a:ext>
             </a:extLst>
           </p:cNvPr>
@@ -2456,7 +2456,7 @@
           <p:cNvPr id="12" name="bullet-3">
             <a:extLst xmlns:a="http://schemas.openxmlformats.org/drawingml/2006/main">
               <a:ext uri="{FF2B5EF4-FFF2-40B4-BE49-F238E27FC236}">
-                <a16:creationId xmlns:a16="http://schemas.microsoft.com/office/drawing/2014/main" id="{1AFF3023-6D6F-49A7-BDE0-322A294C72B9}"/>
+                <a16:creationId xmlns:a16="http://schemas.microsoft.com/office/drawing/2014/main" id="{DA641FB7-31CD-4FE6-9BDE-7EA4EB71FCCF}"/>
               </a:ext>
             </a:extLst>
           </p:cNvPr>
@@ -2487,7 +2487,7 @@
           <p:cNvPr id="13" name="bullet-number-3">
             <a:extLst xmlns:a="http://schemas.openxmlformats.org/drawingml/2006/main">
               <a:ext uri="{FF2B5EF4-FFF2-40B4-BE49-F238E27FC236}">
-                <a16:creationId xmlns:a16="http://schemas.microsoft.com/office/drawing/2014/main" id="{BEA702A2-2A6C-412F-9B4E-A226C56F5D9E}"/>
+                <a16:creationId xmlns:a16="http://schemas.microsoft.com/office/drawing/2014/main" id="{75F48CDE-A1C1-420D-B94A-1E2134D9EE9A}"/>
               </a:ext>
             </a:extLst>
           </p:cNvPr>
@@ -2537,7 +2537,7 @@
           <p:cNvPr id="14" name="bullet-copy-3">
             <a:extLst xmlns:a="http://schemas.openxmlformats.org/drawingml/2006/main">
               <a:ext uri="{FF2B5EF4-FFF2-40B4-BE49-F238E27FC236}">
-                <a16:creationId xmlns:a16="http://schemas.microsoft.com/office/drawing/2014/main" id="{1E478406-8BB0-4042-A286-0432D3A60DBD}"/>
+                <a16:creationId xmlns:a16="http://schemas.microsoft.com/office/drawing/2014/main" id="{83733854-0533-4723-A574-DD1DCBBA3FF0}"/>
               </a:ext>
             </a:extLst>
           </p:cNvPr>
@@ -2585,7 +2585,7 @@
     </p:spTree>
     <p:extLst>
       <p:ext uri="{BB962C8B-B14F-4D97-AF65-F5344CB8AC3E}">
-        <p14:creationId xmlns:p14="http://schemas.microsoft.com/office/powerpoint/2010/main" val="1094097617"/>
+        <p14:creationId xmlns:p14="http://schemas.microsoft.com/office/powerpoint/2010/main" val="256640543"/>
       </p:ext>
     </p:extLst>
   </p:cSld>
@@ -2616,7 +2616,7 @@
           <p:cNvPr id="15" name="top-rule">
             <a:extLst xmlns:a="http://schemas.openxmlformats.org/drawingml/2006/main">
               <a:ext uri="{FF2B5EF4-FFF2-40B4-BE49-F238E27FC236}">
-                <a16:creationId xmlns:a16="http://schemas.microsoft.com/office/drawing/2014/main" id="{1CC9CB8F-3614-4D3A-9B29-4247C7799FFF}"/>
+                <a16:creationId xmlns:a16="http://schemas.microsoft.com/office/drawing/2014/main" id="{3D668352-496C-4C1D-BCEB-57381F89B911}"/>
               </a:ext>
             </a:extLst>
           </p:cNvPr>
@@ -2647,7 +2647,7 @@
           <p:cNvPr id="2" name="course-label">
             <a:extLst xmlns:a="http://schemas.openxmlformats.org/drawingml/2006/main">
               <a:ext uri="{FF2B5EF4-FFF2-40B4-BE49-F238E27FC236}">
-                <a16:creationId xmlns:a16="http://schemas.microsoft.com/office/drawing/2014/main" id="{43E244F5-AD73-4FEA-B1CC-D5A8A072BC01}"/>
+                <a16:creationId xmlns:a16="http://schemas.microsoft.com/office/drawing/2014/main" id="{4EAD5C2A-F259-48A6-B838-939F2377CF9D}"/>
               </a:ext>
             </a:extLst>
           </p:cNvPr>
@@ -2697,7 +2697,7 @@
           <p:cNvPr id="3" name="module-label">
             <a:extLst xmlns:a="http://schemas.openxmlformats.org/drawingml/2006/main">
               <a:ext uri="{FF2B5EF4-FFF2-40B4-BE49-F238E27FC236}">
-                <a16:creationId xmlns:a16="http://schemas.microsoft.com/office/drawing/2014/main" id="{43D66D09-777E-4BFE-B4FF-FCB25D8E6D01}"/>
+                <a16:creationId xmlns:a16="http://schemas.microsoft.com/office/drawing/2014/main" id="{B0E8136A-6EFA-4307-980F-381433457F4C}"/>
               </a:ext>
             </a:extLst>
           </p:cNvPr>
@@ -2747,7 +2747,7 @@
           <p:cNvPr id="4" name="slide-title">
             <a:extLst xmlns:a="http://schemas.openxmlformats.org/drawingml/2006/main">
               <a:ext uri="{FF2B5EF4-FFF2-40B4-BE49-F238E27FC236}">
-                <a16:creationId xmlns:a16="http://schemas.microsoft.com/office/drawing/2014/main" id="{AC2D35C3-2D5B-4814-85A5-8ED270313E71}"/>
+                <a16:creationId xmlns:a16="http://schemas.microsoft.com/office/drawing/2014/main" id="{6F827A36-11AF-4C44-9899-720EA56FC1A0}"/>
               </a:ext>
             </a:extLst>
           </p:cNvPr>
@@ -2797,7 +2797,7 @@
           <p:cNvPr id="5" name="slide-subtitle">
             <a:extLst xmlns:a="http://schemas.openxmlformats.org/drawingml/2006/main">
               <a:ext uri="{FF2B5EF4-FFF2-40B4-BE49-F238E27FC236}">
-                <a16:creationId xmlns:a16="http://schemas.microsoft.com/office/drawing/2014/main" id="{A4DDAA51-E7AC-4063-9898-543C33E580E8}"/>
+                <a16:creationId xmlns:a16="http://schemas.microsoft.com/office/drawing/2014/main" id="{865AF7E2-353B-4A83-8843-5CF1B1AD3807}"/>
               </a:ext>
             </a:extLst>
           </p:cNvPr>
@@ -2847,7 +2847,7 @@
           <p:cNvPr id="6" name="bullet-1">
             <a:extLst xmlns:a="http://schemas.openxmlformats.org/drawingml/2006/main">
               <a:ext uri="{FF2B5EF4-FFF2-40B4-BE49-F238E27FC236}">
-                <a16:creationId xmlns:a16="http://schemas.microsoft.com/office/drawing/2014/main" id="{F3B421B4-0A59-4535-AB1E-ABD696104ACD}"/>
+                <a16:creationId xmlns:a16="http://schemas.microsoft.com/office/drawing/2014/main" id="{E7B93297-C351-442B-9A05-E029169C8867}"/>
               </a:ext>
             </a:extLst>
           </p:cNvPr>
@@ -2878,7 +2878,7 @@
           <p:cNvPr id="7" name="bullet-number-1">
             <a:extLst xmlns:a="http://schemas.openxmlformats.org/drawingml/2006/main">
               <a:ext uri="{FF2B5EF4-FFF2-40B4-BE49-F238E27FC236}">
-                <a16:creationId xmlns:a16="http://schemas.microsoft.com/office/drawing/2014/main" id="{B6B869C7-DB36-44E0-96BA-6579C6C96FB7}"/>
+                <a16:creationId xmlns:a16="http://schemas.microsoft.com/office/drawing/2014/main" id="{B4E7EB88-6F8C-4259-A877-67D02245C6BF}"/>
               </a:ext>
             </a:extLst>
           </p:cNvPr>
@@ -2928,7 +2928,7 @@
           <p:cNvPr id="8" name="bullet-copy-1">
             <a:extLst xmlns:a="http://schemas.openxmlformats.org/drawingml/2006/main">
               <a:ext uri="{FF2B5EF4-FFF2-40B4-BE49-F238E27FC236}">
-                <a16:creationId xmlns:a16="http://schemas.microsoft.com/office/drawing/2014/main" id="{B1424AF1-1685-4818-B211-EBFCEFA7A20F}"/>
+                <a16:creationId xmlns:a16="http://schemas.microsoft.com/office/drawing/2014/main" id="{554AB5FD-C1B2-43DD-AE13-4972ED6328C9}"/>
               </a:ext>
             </a:extLst>
           </p:cNvPr>
@@ -2978,7 +2978,7 @@
           <p:cNvPr id="9" name="bullet-2">
             <a:extLst xmlns:a="http://schemas.openxmlformats.org/drawingml/2006/main">
               <a:ext uri="{FF2B5EF4-FFF2-40B4-BE49-F238E27FC236}">
-                <a16:creationId xmlns:a16="http://schemas.microsoft.com/office/drawing/2014/main" id="{44C20AE9-705D-4465-8F11-14C49CC1432E}"/>
+                <a16:creationId xmlns:a16="http://schemas.microsoft.com/office/drawing/2014/main" id="{B4E8F034-BAF9-494B-9190-B883C48C0BBC}"/>
               </a:ext>
             </a:extLst>
           </p:cNvPr>
@@ -3009,7 +3009,7 @@
           <p:cNvPr id="10" name="bullet-number-2">
             <a:extLst xmlns:a="http://schemas.openxmlformats.org/drawingml/2006/main">
               <a:ext uri="{FF2B5EF4-FFF2-40B4-BE49-F238E27FC236}">
-                <a16:creationId xmlns:a16="http://schemas.microsoft.com/office/drawing/2014/main" id="{18846766-2386-4A75-8F10-AE31423F3F33}"/>
+                <a16:creationId xmlns:a16="http://schemas.microsoft.com/office/drawing/2014/main" id="{325A3E64-9E5C-44DF-8F56-B3F755F7F77D}"/>
               </a:ext>
             </a:extLst>
           </p:cNvPr>
@@ -3059,7 +3059,7 @@
           <p:cNvPr id="11" name="bullet-copy-2">
             <a:extLst xmlns:a="http://schemas.openxmlformats.org/drawingml/2006/main">
               <a:ext uri="{FF2B5EF4-FFF2-40B4-BE49-F238E27FC236}">
-                <a16:creationId xmlns:a16="http://schemas.microsoft.com/office/drawing/2014/main" id="{5DDCF71D-D06A-4067-9948-C15FEFAF218D}"/>
+                <a16:creationId xmlns:a16="http://schemas.microsoft.com/office/drawing/2014/main" id="{BD0E41BB-51B9-4E80-B608-3C9B6F35B09C}"/>
               </a:ext>
             </a:extLst>
           </p:cNvPr>
@@ -3099,7 +3099,7 @@
                   <a:srgbClr val="16343A"/>
                 </a:solidFill>
               </a:rPr>
-              <a:t>They appear in clothing, furnishings, transport, health products, protective equipment, packaging and household items.</a:t>
+              <a:t>Textile products are systems, not just pieces of fabric.</a:t>
             </a:r>
           </a:p>
         </p:txBody>
@@ -3109,7 +3109,7 @@
           <p:cNvPr id="12" name="bullet-3">
             <a:extLst xmlns:a="http://schemas.openxmlformats.org/drawingml/2006/main">
               <a:ext uri="{FF2B5EF4-FFF2-40B4-BE49-F238E27FC236}">
-                <a16:creationId xmlns:a16="http://schemas.microsoft.com/office/drawing/2014/main" id="{E9F3DF5D-2B0F-4F5E-A592-07B1EECBC4D8}"/>
+                <a16:creationId xmlns:a16="http://schemas.microsoft.com/office/drawing/2014/main" id="{73EDB2CF-6BE6-4AF8-A24E-914416126B62}"/>
               </a:ext>
             </a:extLst>
           </p:cNvPr>
@@ -3140,7 +3140,7 @@
           <p:cNvPr id="13" name="bullet-number-3">
             <a:extLst xmlns:a="http://schemas.openxmlformats.org/drawingml/2006/main">
               <a:ext uri="{FF2B5EF4-FFF2-40B4-BE49-F238E27FC236}">
-                <a16:creationId xmlns:a16="http://schemas.microsoft.com/office/drawing/2014/main" id="{153697A3-3A79-4E5B-8329-F1C5BE3FC66C}"/>
+                <a16:creationId xmlns:a16="http://schemas.microsoft.com/office/drawing/2014/main" id="{EFADFFE8-342A-48FB-85A5-3956D5B955FE}"/>
               </a:ext>
             </a:extLst>
           </p:cNvPr>
@@ -3190,7 +3190,7 @@
           <p:cNvPr id="14" name="bullet-copy-3">
             <a:extLst xmlns:a="http://schemas.openxmlformats.org/drawingml/2006/main">
               <a:ext uri="{FF2B5EF4-FFF2-40B4-BE49-F238E27FC236}">
-                <a16:creationId xmlns:a16="http://schemas.microsoft.com/office/drawing/2014/main" id="{37B1C9C1-90DB-4779-B596-F9F4F4BAF9F5}"/>
+                <a16:creationId xmlns:a16="http://schemas.microsoft.com/office/drawing/2014/main" id="{2EAA49D4-03AD-4223-8196-24B636596FAA}"/>
               </a:ext>
             </a:extLst>
           </p:cNvPr>
@@ -3230,7 +3230,7 @@
                   <a:srgbClr val="16343A"/>
                 </a:solidFill>
               </a:rPr>
-              <a:t>The same textile is not suitable for every job.</a:t>
+              <a:t>When investigating a product, move from name it to explain it : identify the component, state its function, name the property that supports that function and note a p…</a:t>
             </a:r>
           </a:p>
         </p:txBody>
@@ -3238,7 +3238,7 @@
     </p:spTree>
     <p:extLst>
       <p:ext uri="{BB962C8B-B14F-4D97-AF65-F5344CB8AC3E}">
-        <p14:creationId xmlns:p14="http://schemas.microsoft.com/office/powerpoint/2010/main" val="1651946183"/>
+        <p14:creationId xmlns:p14="http://schemas.microsoft.com/office/powerpoint/2010/main" val="813662653"/>
       </p:ext>
     </p:extLst>
   </p:cSld>
@@ -3269,7 +3269,7 @@
           <p:cNvPr id="12" name="top-rule">
             <a:extLst xmlns:a="http://schemas.openxmlformats.org/drawingml/2006/main">
               <a:ext uri="{FF2B5EF4-FFF2-40B4-BE49-F238E27FC236}">
-                <a16:creationId xmlns:a16="http://schemas.microsoft.com/office/drawing/2014/main" id="{817894EB-AF6F-4C24-8878-34C2C0AFA6CF}"/>
+                <a16:creationId xmlns:a16="http://schemas.microsoft.com/office/drawing/2014/main" id="{8F2CC8D3-BBBD-4491-965E-A56E4594BE24}"/>
               </a:ext>
             </a:extLst>
           </p:cNvPr>
@@ -3300,7 +3300,7 @@
           <p:cNvPr id="2" name="course-label">
             <a:extLst xmlns:a="http://schemas.openxmlformats.org/drawingml/2006/main">
               <a:ext uri="{FF2B5EF4-FFF2-40B4-BE49-F238E27FC236}">
-                <a16:creationId xmlns:a16="http://schemas.microsoft.com/office/drawing/2014/main" id="{1373C9FB-B7D9-48E8-9849-7B433EF1D76F}"/>
+                <a16:creationId xmlns:a16="http://schemas.microsoft.com/office/drawing/2014/main" id="{DBFC374F-7D55-44A6-8E80-01021695C0EF}"/>
               </a:ext>
             </a:extLst>
           </p:cNvPr>
@@ -3350,7 +3350,7 @@
           <p:cNvPr id="3" name="module-label">
             <a:extLst xmlns:a="http://schemas.openxmlformats.org/drawingml/2006/main">
               <a:ext uri="{FF2B5EF4-FFF2-40B4-BE49-F238E27FC236}">
-                <a16:creationId xmlns:a16="http://schemas.microsoft.com/office/drawing/2014/main" id="{38A01C4F-8D22-4E30-AF5C-E9FACCE07AE4}"/>
+                <a16:creationId xmlns:a16="http://schemas.microsoft.com/office/drawing/2014/main" id="{96068F0F-8513-4797-A09E-4FE5DF0AF5B9}"/>
               </a:ext>
             </a:extLst>
           </p:cNvPr>
@@ -3400,7 +3400,7 @@
           <p:cNvPr id="4" name="slide-title">
             <a:extLst xmlns:a="http://schemas.openxmlformats.org/drawingml/2006/main">
               <a:ext uri="{FF2B5EF4-FFF2-40B4-BE49-F238E27FC236}">
-                <a16:creationId xmlns:a16="http://schemas.microsoft.com/office/drawing/2014/main" id="{01EC3ABE-BD45-41AD-9594-024A360A9B18}"/>
+                <a16:creationId xmlns:a16="http://schemas.microsoft.com/office/drawing/2014/main" id="{2D3774BC-DC84-4B99-A89F-F3D8E2DBF971}"/>
               </a:ext>
             </a:extLst>
           </p:cNvPr>
@@ -3450,7 +3450,7 @@
           <p:cNvPr id="5" name="slide-subtitle">
             <a:extLst xmlns:a="http://schemas.openxmlformats.org/drawingml/2006/main">
               <a:ext uri="{FF2B5EF4-FFF2-40B4-BE49-F238E27FC236}">
-                <a16:creationId xmlns:a16="http://schemas.microsoft.com/office/drawing/2014/main" id="{35A0CE6E-7112-4B4B-98CE-BD6A225F3100}"/>
+                <a16:creationId xmlns:a16="http://schemas.microsoft.com/office/drawing/2014/main" id="{8DDA30D3-796C-4D5D-A2C2-4FD8ABC7403B}"/>
               </a:ext>
             </a:extLst>
           </p:cNvPr>
@@ -3500,7 +3500,7 @@
           <p:cNvPr id="6" name="prompt-accent">
             <a:extLst xmlns:a="http://schemas.openxmlformats.org/drawingml/2006/main">
               <a:ext uri="{FF2B5EF4-FFF2-40B4-BE49-F238E27FC236}">
-                <a16:creationId xmlns:a16="http://schemas.microsoft.com/office/drawing/2014/main" id="{881B0EDF-8502-4D9E-876B-962E620B16E3}"/>
+                <a16:creationId xmlns:a16="http://schemas.microsoft.com/office/drawing/2014/main" id="{4B43A168-D6B3-4B63-8C1E-756D281FAF56}"/>
               </a:ext>
             </a:extLst>
           </p:cNvPr>
@@ -3531,7 +3531,7 @@
           <p:cNvPr id="7" name="plain-language">
             <a:extLst xmlns:a="http://schemas.openxmlformats.org/drawingml/2006/main">
               <a:ext uri="{FF2B5EF4-FFF2-40B4-BE49-F238E27FC236}">
-                <a16:creationId xmlns:a16="http://schemas.microsoft.com/office/drawing/2014/main" id="{38D47915-9E6C-4123-A86A-24E39BBC8846}"/>
+                <a16:creationId xmlns:a16="http://schemas.microsoft.com/office/drawing/2014/main" id="{64AF8E77-4066-4E91-A2FE-9B773FB7D00A}"/>
               </a:ext>
             </a:extLst>
           </p:cNvPr>
@@ -3581,7 +3581,7 @@
           <p:cNvPr id="8" name="clarify">
             <a:extLst xmlns:a="http://schemas.openxmlformats.org/drawingml/2006/main">
               <a:ext uri="{FF2B5EF4-FFF2-40B4-BE49-F238E27FC236}">
-                <a16:creationId xmlns:a16="http://schemas.microsoft.com/office/drawing/2014/main" id="{0716C49D-81EE-4ED6-ABED-A5C301548679}"/>
+                <a16:creationId xmlns:a16="http://schemas.microsoft.com/office/drawing/2014/main" id="{25488C99-322D-4B9B-A667-2D1F86F3245E}"/>
               </a:ext>
             </a:extLst>
           </p:cNvPr>
@@ -3631,7 +3631,7 @@
           <p:cNvPr id="9" name="starter-label">
             <a:extLst xmlns:a="http://schemas.openxmlformats.org/drawingml/2006/main">
               <a:ext uri="{FF2B5EF4-FFF2-40B4-BE49-F238E27FC236}">
-                <a16:creationId xmlns:a16="http://schemas.microsoft.com/office/drawing/2014/main" id="{B2193FA8-9704-4CEB-AB9D-886662F3830B}"/>
+                <a16:creationId xmlns:a16="http://schemas.microsoft.com/office/drawing/2014/main" id="{88A384D6-9C1A-405B-AD86-B8120BE4D0DC}"/>
               </a:ext>
             </a:extLst>
           </p:cNvPr>
@@ -3681,7 +3681,7 @@
           <p:cNvPr id="10" name="starter">
             <a:extLst xmlns:a="http://schemas.openxmlformats.org/drawingml/2006/main">
               <a:ext uri="{FF2B5EF4-FFF2-40B4-BE49-F238E27FC236}">
-                <a16:creationId xmlns:a16="http://schemas.microsoft.com/office/drawing/2014/main" id="{71BB06C1-43C0-4F10-96ED-144B58E6FA01}"/>
+                <a16:creationId xmlns:a16="http://schemas.microsoft.com/office/drawing/2014/main" id="{74D0901A-32DB-4270-AED2-4CC876AC157A}"/>
               </a:ext>
             </a:extLst>
           </p:cNvPr>
@@ -3731,7 +3731,7 @@
           <p:cNvPr id="11" name="action">
             <a:extLst xmlns:a="http://schemas.openxmlformats.org/drawingml/2006/main">
               <a:ext uri="{FF2B5EF4-FFF2-40B4-BE49-F238E27FC236}">
-                <a16:creationId xmlns:a16="http://schemas.microsoft.com/office/drawing/2014/main" id="{9E1D324C-8772-4AEA-86DC-EDC1C93E30FF}"/>
+                <a16:creationId xmlns:a16="http://schemas.microsoft.com/office/drawing/2014/main" id="{EA08FC3A-F927-41B2-BA06-0895AED0A8BF}"/>
               </a:ext>
             </a:extLst>
           </p:cNvPr>
@@ -3779,7 +3779,7 @@
     </p:spTree>
     <p:extLst>
       <p:ext uri="{BB962C8B-B14F-4D97-AF65-F5344CB8AC3E}">
-        <p14:creationId xmlns:p14="http://schemas.microsoft.com/office/powerpoint/2010/main" val="102879050"/>
+        <p14:creationId xmlns:p14="http://schemas.microsoft.com/office/powerpoint/2010/main" val="1793254314"/>
       </p:ext>
     </p:extLst>
   </p:cSld>
@@ -3810,7 +3810,7 @@
           <p:cNvPr id="15" name="top-rule">
             <a:extLst xmlns:a="http://schemas.openxmlformats.org/drawingml/2006/main">
               <a:ext uri="{FF2B5EF4-FFF2-40B4-BE49-F238E27FC236}">
-                <a16:creationId xmlns:a16="http://schemas.microsoft.com/office/drawing/2014/main" id="{5826B77A-624D-4107-B3B2-21B7E0D2A016}"/>
+                <a16:creationId xmlns:a16="http://schemas.microsoft.com/office/drawing/2014/main" id="{3F1B2D33-A6DC-4C67-BEC1-762D195D7D9A}"/>
               </a:ext>
             </a:extLst>
           </p:cNvPr>
@@ -3841,7 +3841,7 @@
           <p:cNvPr id="2" name="course-label">
             <a:extLst xmlns:a="http://schemas.openxmlformats.org/drawingml/2006/main">
               <a:ext uri="{FF2B5EF4-FFF2-40B4-BE49-F238E27FC236}">
-                <a16:creationId xmlns:a16="http://schemas.microsoft.com/office/drawing/2014/main" id="{B78252AF-8F02-4B2F-B734-FAD301B5CE88}"/>
+                <a16:creationId xmlns:a16="http://schemas.microsoft.com/office/drawing/2014/main" id="{26F0FD8E-3301-474D-BC26-E832E7078B22}"/>
               </a:ext>
             </a:extLst>
           </p:cNvPr>
@@ -3891,7 +3891,7 @@
           <p:cNvPr id="3" name="module-label">
             <a:extLst xmlns:a="http://schemas.openxmlformats.org/drawingml/2006/main">
               <a:ext uri="{FF2B5EF4-FFF2-40B4-BE49-F238E27FC236}">
-                <a16:creationId xmlns:a16="http://schemas.microsoft.com/office/drawing/2014/main" id="{4EB168FC-F2FC-43A4-AFDA-724A6F511979}"/>
+                <a16:creationId xmlns:a16="http://schemas.microsoft.com/office/drawing/2014/main" id="{1EB21FE0-3F80-4988-BD76-31631652E498}"/>
               </a:ext>
             </a:extLst>
           </p:cNvPr>
@@ -3941,7 +3941,7 @@
           <p:cNvPr id="4" name="slide-title">
             <a:extLst xmlns:a="http://schemas.openxmlformats.org/drawingml/2006/main">
               <a:ext uri="{FF2B5EF4-FFF2-40B4-BE49-F238E27FC236}">
-                <a16:creationId xmlns:a16="http://schemas.microsoft.com/office/drawing/2014/main" id="{1EB925FC-5A3D-4E4E-AB3A-4EEF2F2BDFF6}"/>
+                <a16:creationId xmlns:a16="http://schemas.microsoft.com/office/drawing/2014/main" id="{B71964AA-91D2-4AB7-BD3A-E82C483851CA}"/>
               </a:ext>
             </a:extLst>
           </p:cNvPr>
@@ -3991,7 +3991,7 @@
           <p:cNvPr id="5" name="slide-subtitle">
             <a:extLst xmlns:a="http://schemas.openxmlformats.org/drawingml/2006/main">
               <a:ext uri="{FF2B5EF4-FFF2-40B4-BE49-F238E27FC236}">
-                <a16:creationId xmlns:a16="http://schemas.microsoft.com/office/drawing/2014/main" id="{72E0AA2E-09CC-41BD-849E-3C498B2EA41E}"/>
+                <a16:creationId xmlns:a16="http://schemas.microsoft.com/office/drawing/2014/main" id="{2C0DCB83-8C4E-4126-A580-E3F89AFEEDE9}"/>
               </a:ext>
             </a:extLst>
           </p:cNvPr>
@@ -4041,7 +4041,7 @@
           <p:cNvPr id="6" name="bullet-1">
             <a:extLst xmlns:a="http://schemas.openxmlformats.org/drawingml/2006/main">
               <a:ext uri="{FF2B5EF4-FFF2-40B4-BE49-F238E27FC236}">
-                <a16:creationId xmlns:a16="http://schemas.microsoft.com/office/drawing/2014/main" id="{E1D1334E-631F-46BD-8C5D-0A330129BEA5}"/>
+                <a16:creationId xmlns:a16="http://schemas.microsoft.com/office/drawing/2014/main" id="{F3A4624D-FB5A-424D-AFA6-D52ECBD0A8BD}"/>
               </a:ext>
             </a:extLst>
           </p:cNvPr>
@@ -4072,7 +4072,7 @@
           <p:cNvPr id="7" name="bullet-number-1">
             <a:extLst xmlns:a="http://schemas.openxmlformats.org/drawingml/2006/main">
               <a:ext uri="{FF2B5EF4-FFF2-40B4-BE49-F238E27FC236}">
-                <a16:creationId xmlns:a16="http://schemas.microsoft.com/office/drawing/2014/main" id="{2A05DFF0-BC6D-47F0-A763-887374BC2F17}"/>
+                <a16:creationId xmlns:a16="http://schemas.microsoft.com/office/drawing/2014/main" id="{36DB0212-1E8C-4DE4-8C61-F0766364489D}"/>
               </a:ext>
             </a:extLst>
           </p:cNvPr>
@@ -4122,7 +4122,7 @@
           <p:cNvPr id="8" name="bullet-copy-1">
             <a:extLst xmlns:a="http://schemas.openxmlformats.org/drawingml/2006/main">
               <a:ext uri="{FF2B5EF4-FFF2-40B4-BE49-F238E27FC236}">
-                <a16:creationId xmlns:a16="http://schemas.microsoft.com/office/drawing/2014/main" id="{8C531ACB-D709-4592-9FAE-02D8924807BE}"/>
+                <a16:creationId xmlns:a16="http://schemas.microsoft.com/office/drawing/2014/main" id="{A5F46CB5-A82A-4E60-84E1-5CE3E9E6A06A}"/>
               </a:ext>
             </a:extLst>
           </p:cNvPr>
@@ -4172,7 +4172,7 @@
           <p:cNvPr id="9" name="bullet-2">
             <a:extLst xmlns:a="http://schemas.openxmlformats.org/drawingml/2006/main">
               <a:ext uri="{FF2B5EF4-FFF2-40B4-BE49-F238E27FC236}">
-                <a16:creationId xmlns:a16="http://schemas.microsoft.com/office/drawing/2014/main" id="{D501453E-3A78-4B1A-8F76-2211D50B3B3A}"/>
+                <a16:creationId xmlns:a16="http://schemas.microsoft.com/office/drawing/2014/main" id="{9DA7E183-B1EF-42FD-BBC1-903A954CD418}"/>
               </a:ext>
             </a:extLst>
           </p:cNvPr>
@@ -4203,7 +4203,7 @@
           <p:cNvPr id="10" name="bullet-number-2">
             <a:extLst xmlns:a="http://schemas.openxmlformats.org/drawingml/2006/main">
               <a:ext uri="{FF2B5EF4-FFF2-40B4-BE49-F238E27FC236}">
-                <a16:creationId xmlns:a16="http://schemas.microsoft.com/office/drawing/2014/main" id="{F2693B92-6F9C-4550-8067-33305DBC1C2F}"/>
+                <a16:creationId xmlns:a16="http://schemas.microsoft.com/office/drawing/2014/main" id="{84FE5209-AD45-4048-9953-427D4A4DD783}"/>
               </a:ext>
             </a:extLst>
           </p:cNvPr>
@@ -4253,7 +4253,7 @@
           <p:cNvPr id="11" name="bullet-copy-2">
             <a:extLst xmlns:a="http://schemas.openxmlformats.org/drawingml/2006/main">
               <a:ext uri="{FF2B5EF4-FFF2-40B4-BE49-F238E27FC236}">
-                <a16:creationId xmlns:a16="http://schemas.microsoft.com/office/drawing/2014/main" id="{BC91D1D3-584F-4E11-962D-5173C123D791}"/>
+                <a16:creationId xmlns:a16="http://schemas.microsoft.com/office/drawing/2014/main" id="{7F772E51-E06A-4F60-9913-62CFF128E336}"/>
               </a:ext>
             </a:extLst>
           </p:cNvPr>
@@ -4293,7 +4293,7 @@
                   <a:srgbClr val="16343A"/>
                 </a:solidFill>
               </a:rPr>
-              <a:t>Fibres can be twisted into yarn , and yarns can be woven or knitted into fabric.</a:t>
+              <a:t>Woven structures usually show two sets of yarns crossing at right angles.</a:t>
             </a:r>
           </a:p>
         </p:txBody>
@@ -4303,7 +4303,7 @@
           <p:cNvPr id="12" name="bullet-3">
             <a:extLst xmlns:a="http://schemas.openxmlformats.org/drawingml/2006/main">
               <a:ext uri="{FF2B5EF4-FFF2-40B4-BE49-F238E27FC236}">
-                <a16:creationId xmlns:a16="http://schemas.microsoft.com/office/drawing/2014/main" id="{290378EF-25E4-4404-B03C-857DA0846722}"/>
+                <a16:creationId xmlns:a16="http://schemas.microsoft.com/office/drawing/2014/main" id="{A7D10E03-F6F0-4D56-966E-2A179D5C70B0}"/>
               </a:ext>
             </a:extLst>
           </p:cNvPr>
@@ -4334,7 +4334,7 @@
           <p:cNvPr id="13" name="bullet-number-3">
             <a:extLst xmlns:a="http://schemas.openxmlformats.org/drawingml/2006/main">
               <a:ext uri="{FF2B5EF4-FFF2-40B4-BE49-F238E27FC236}">
-                <a16:creationId xmlns:a16="http://schemas.microsoft.com/office/drawing/2014/main" id="{D2FB080D-0EA3-46AF-8509-FECD779BB406}"/>
+                <a16:creationId xmlns:a16="http://schemas.microsoft.com/office/drawing/2014/main" id="{C9B1AE8E-9E68-44A6-A6B4-4E7F73A7CB1F}"/>
               </a:ext>
             </a:extLst>
           </p:cNvPr>
@@ -4384,7 +4384,7 @@
           <p:cNvPr id="14" name="bullet-copy-3">
             <a:extLst xmlns:a="http://schemas.openxmlformats.org/drawingml/2006/main">
               <a:ext uri="{FF2B5EF4-FFF2-40B4-BE49-F238E27FC236}">
-                <a16:creationId xmlns:a16="http://schemas.microsoft.com/office/drawing/2014/main" id="{C75DDBA8-43AF-4B7C-AD47-5236D45593F3}"/>
+                <a16:creationId xmlns:a16="http://schemas.microsoft.com/office/drawing/2014/main" id="{0ED13C3B-F63D-4C1B-BDF4-AF8F43FD2100}"/>
               </a:ext>
             </a:extLst>
           </p:cNvPr>
@@ -4424,7 +4424,7 @@
                   <a:srgbClr val="16343A"/>
                 </a:solidFill>
               </a:rPr>
-              <a:t>Some fabrics are made by bonding or felting fibres rather than interlacing yarns.</a:t>
+              <a:t>Structure does not determine every property, but it gives useful clues.</a:t>
             </a:r>
           </a:p>
         </p:txBody>
@@ -4432,7 +4432,7 @@
     </p:spTree>
     <p:extLst>
       <p:ext uri="{BB962C8B-B14F-4D97-AF65-F5344CB8AC3E}">
-        <p14:creationId xmlns:p14="http://schemas.microsoft.com/office/powerpoint/2010/main" val="1000581823"/>
+        <p14:creationId xmlns:p14="http://schemas.microsoft.com/office/powerpoint/2010/main" val="1079656245"/>
       </p:ext>
     </p:extLst>
   </p:cSld>
@@ -4463,7 +4463,7 @@
           <p:cNvPr id="12" name="top-rule">
             <a:extLst xmlns:a="http://schemas.openxmlformats.org/drawingml/2006/main">
               <a:ext uri="{FF2B5EF4-FFF2-40B4-BE49-F238E27FC236}">
-                <a16:creationId xmlns:a16="http://schemas.microsoft.com/office/drawing/2014/main" id="{DF081F81-8560-44A7-B05F-641D46313D42}"/>
+                <a16:creationId xmlns:a16="http://schemas.microsoft.com/office/drawing/2014/main" id="{780A8A9E-E565-4431-8700-4E33A4C5DCDC}"/>
               </a:ext>
             </a:extLst>
           </p:cNvPr>
@@ -4494,7 +4494,7 @@
           <p:cNvPr id="2" name="course-label">
             <a:extLst xmlns:a="http://schemas.openxmlformats.org/drawingml/2006/main">
               <a:ext uri="{FF2B5EF4-FFF2-40B4-BE49-F238E27FC236}">
-                <a16:creationId xmlns:a16="http://schemas.microsoft.com/office/drawing/2014/main" id="{F8FCD26D-1581-44EF-BA5D-D4508135DF7C}"/>
+                <a16:creationId xmlns:a16="http://schemas.microsoft.com/office/drawing/2014/main" id="{08BD5835-7864-4BC0-ACC4-958B6BB9430D}"/>
               </a:ext>
             </a:extLst>
           </p:cNvPr>
@@ -4544,7 +4544,7 @@
           <p:cNvPr id="3" name="module-label">
             <a:extLst xmlns:a="http://schemas.openxmlformats.org/drawingml/2006/main">
               <a:ext uri="{FF2B5EF4-FFF2-40B4-BE49-F238E27FC236}">
-                <a16:creationId xmlns:a16="http://schemas.microsoft.com/office/drawing/2014/main" id="{C733D861-A469-4E90-9B5C-B71ED5214CFD}"/>
+                <a16:creationId xmlns:a16="http://schemas.microsoft.com/office/drawing/2014/main" id="{F9234F9D-A2B7-467B-90C3-4E3465A36134}"/>
               </a:ext>
             </a:extLst>
           </p:cNvPr>
@@ -4594,7 +4594,7 @@
           <p:cNvPr id="4" name="slide-title">
             <a:extLst xmlns:a="http://schemas.openxmlformats.org/drawingml/2006/main">
               <a:ext uri="{FF2B5EF4-FFF2-40B4-BE49-F238E27FC236}">
-                <a16:creationId xmlns:a16="http://schemas.microsoft.com/office/drawing/2014/main" id="{9D1EC705-DB0E-480D-838E-8F93B6C9CCD3}"/>
+                <a16:creationId xmlns:a16="http://schemas.microsoft.com/office/drawing/2014/main" id="{2444AC98-1152-41CF-9934-73A237BA1561}"/>
               </a:ext>
             </a:extLst>
           </p:cNvPr>
@@ -4644,7 +4644,7 @@
           <p:cNvPr id="5" name="slide-subtitle">
             <a:extLst xmlns:a="http://schemas.openxmlformats.org/drawingml/2006/main">
               <a:ext uri="{FF2B5EF4-FFF2-40B4-BE49-F238E27FC236}">
-                <a16:creationId xmlns:a16="http://schemas.microsoft.com/office/drawing/2014/main" id="{66149578-C9B5-41FF-AD8F-E868C65ACD60}"/>
+                <a16:creationId xmlns:a16="http://schemas.microsoft.com/office/drawing/2014/main" id="{4D2112AF-5332-48F8-B0DC-2335AAC5606A}"/>
               </a:ext>
             </a:extLst>
           </p:cNvPr>
@@ -4694,7 +4694,7 @@
           <p:cNvPr id="6" name="prompt-accent">
             <a:extLst xmlns:a="http://schemas.openxmlformats.org/drawingml/2006/main">
               <a:ext uri="{FF2B5EF4-FFF2-40B4-BE49-F238E27FC236}">
-                <a16:creationId xmlns:a16="http://schemas.microsoft.com/office/drawing/2014/main" id="{56E733F4-791E-49BD-89E9-3242ADF0B2A2}"/>
+                <a16:creationId xmlns:a16="http://schemas.microsoft.com/office/drawing/2014/main" id="{4132AD2D-93A6-4B1C-8F1F-8D52889302B8}"/>
               </a:ext>
             </a:extLst>
           </p:cNvPr>
@@ -4725,7 +4725,7 @@
           <p:cNvPr id="7" name="plain-language">
             <a:extLst xmlns:a="http://schemas.openxmlformats.org/drawingml/2006/main">
               <a:ext uri="{FF2B5EF4-FFF2-40B4-BE49-F238E27FC236}">
-                <a16:creationId xmlns:a16="http://schemas.microsoft.com/office/drawing/2014/main" id="{35620ABC-365D-4155-8F95-4E1D31487197}"/>
+                <a16:creationId xmlns:a16="http://schemas.microsoft.com/office/drawing/2014/main" id="{93097479-366E-495F-AFFD-8177F64CF4BF}"/>
               </a:ext>
             </a:extLst>
           </p:cNvPr>
@@ -4775,7 +4775,7 @@
           <p:cNvPr id="8" name="clarify">
             <a:extLst xmlns:a="http://schemas.openxmlformats.org/drawingml/2006/main">
               <a:ext uri="{FF2B5EF4-FFF2-40B4-BE49-F238E27FC236}">
-                <a16:creationId xmlns:a16="http://schemas.microsoft.com/office/drawing/2014/main" id="{2712F66D-CF17-4315-BC3A-6212B70E025B}"/>
+                <a16:creationId xmlns:a16="http://schemas.microsoft.com/office/drawing/2014/main" id="{AC29B533-359F-427B-B0A2-D91867A05E2A}"/>
               </a:ext>
             </a:extLst>
           </p:cNvPr>
@@ -4825,7 +4825,7 @@
           <p:cNvPr id="9" name="starter-label">
             <a:extLst xmlns:a="http://schemas.openxmlformats.org/drawingml/2006/main">
               <a:ext uri="{FF2B5EF4-FFF2-40B4-BE49-F238E27FC236}">
-                <a16:creationId xmlns:a16="http://schemas.microsoft.com/office/drawing/2014/main" id="{119CA9A5-A0F9-4493-9263-C60F49737796}"/>
+                <a16:creationId xmlns:a16="http://schemas.microsoft.com/office/drawing/2014/main" id="{44C95498-51C2-4386-9256-A53C9C8660F0}"/>
               </a:ext>
             </a:extLst>
           </p:cNvPr>
@@ -4875,7 +4875,7 @@
           <p:cNvPr id="10" name="starter">
             <a:extLst xmlns:a="http://schemas.openxmlformats.org/drawingml/2006/main">
               <a:ext uri="{FF2B5EF4-FFF2-40B4-BE49-F238E27FC236}">
-                <a16:creationId xmlns:a16="http://schemas.microsoft.com/office/drawing/2014/main" id="{F4E77DC5-9865-4511-B1D3-F2D61F31F949}"/>
+                <a16:creationId xmlns:a16="http://schemas.microsoft.com/office/drawing/2014/main" id="{04113DC2-EB7C-4C4B-97F4-8CC51FFDF3B7}"/>
               </a:ext>
             </a:extLst>
           </p:cNvPr>
@@ -4925,7 +4925,7 @@
           <p:cNvPr id="11" name="action">
             <a:extLst xmlns:a="http://schemas.openxmlformats.org/drawingml/2006/main">
               <a:ext uri="{FF2B5EF4-FFF2-40B4-BE49-F238E27FC236}">
-                <a16:creationId xmlns:a16="http://schemas.microsoft.com/office/drawing/2014/main" id="{55A62678-61DC-4682-B88F-8AB1E23BD02C}"/>
+                <a16:creationId xmlns:a16="http://schemas.microsoft.com/office/drawing/2014/main" id="{211397C2-7D07-41F5-B562-0F46717BA820}"/>
               </a:ext>
             </a:extLst>
           </p:cNvPr>
@@ -4973,7 +4973,7 @@
     </p:spTree>
     <p:extLst>
       <p:ext uri="{BB962C8B-B14F-4D97-AF65-F5344CB8AC3E}">
-        <p14:creationId xmlns:p14="http://schemas.microsoft.com/office/powerpoint/2010/main" val="726299437"/>
+        <p14:creationId xmlns:p14="http://schemas.microsoft.com/office/powerpoint/2010/main" val="247640392"/>
       </p:ext>
     </p:extLst>
   </p:cSld>
@@ -5004,7 +5004,7 @@
           <p:cNvPr id="15" name="top-rule">
             <a:extLst xmlns:a="http://schemas.openxmlformats.org/drawingml/2006/main">
               <a:ext uri="{FF2B5EF4-FFF2-40B4-BE49-F238E27FC236}">
-                <a16:creationId xmlns:a16="http://schemas.microsoft.com/office/drawing/2014/main" id="{299E9EC0-A717-4DA6-9E2D-B09EDBCA8F9E}"/>
+                <a16:creationId xmlns:a16="http://schemas.microsoft.com/office/drawing/2014/main" id="{8CB2B01B-18D6-47FE-9A08-1B5AA7115F2D}"/>
               </a:ext>
             </a:extLst>
           </p:cNvPr>
@@ -5035,7 +5035,7 @@
           <p:cNvPr id="2" name="course-label">
             <a:extLst xmlns:a="http://schemas.openxmlformats.org/drawingml/2006/main">
               <a:ext uri="{FF2B5EF4-FFF2-40B4-BE49-F238E27FC236}">
-                <a16:creationId xmlns:a16="http://schemas.microsoft.com/office/drawing/2014/main" id="{25896D65-47DB-4EC6-8155-1D9F0ABAFC6C}"/>
+                <a16:creationId xmlns:a16="http://schemas.microsoft.com/office/drawing/2014/main" id="{E5AD5DBE-51D4-482B-A368-3E035BF4A012}"/>
               </a:ext>
             </a:extLst>
           </p:cNvPr>
@@ -5085,7 +5085,7 @@
           <p:cNvPr id="3" name="module-label">
             <a:extLst xmlns:a="http://schemas.openxmlformats.org/drawingml/2006/main">
               <a:ext uri="{FF2B5EF4-FFF2-40B4-BE49-F238E27FC236}">
-                <a16:creationId xmlns:a16="http://schemas.microsoft.com/office/drawing/2014/main" id="{2FDA013B-C807-4EB3-A8E5-941CC02962E6}"/>
+                <a16:creationId xmlns:a16="http://schemas.microsoft.com/office/drawing/2014/main" id="{CDE878C1-C3D3-432E-AD0E-B001E9A8A701}"/>
               </a:ext>
             </a:extLst>
           </p:cNvPr>
@@ -5135,7 +5135,7 @@
           <p:cNvPr id="4" name="slide-title">
             <a:extLst xmlns:a="http://schemas.openxmlformats.org/drawingml/2006/main">
               <a:ext uri="{FF2B5EF4-FFF2-40B4-BE49-F238E27FC236}">
-                <a16:creationId xmlns:a16="http://schemas.microsoft.com/office/drawing/2014/main" id="{D68F5162-E42F-4661-A1DC-933DCE30D9B3}"/>
+                <a16:creationId xmlns:a16="http://schemas.microsoft.com/office/drawing/2014/main" id="{90ACABC8-2C3D-412C-8EDC-90F682E7E58D}"/>
               </a:ext>
             </a:extLst>
           </p:cNvPr>
@@ -5185,7 +5185,7 @@
           <p:cNvPr id="5" name="slide-subtitle">
             <a:extLst xmlns:a="http://schemas.openxmlformats.org/drawingml/2006/main">
               <a:ext uri="{FF2B5EF4-FFF2-40B4-BE49-F238E27FC236}">
-                <a16:creationId xmlns:a16="http://schemas.microsoft.com/office/drawing/2014/main" id="{A9D8633C-F949-47CA-8901-6EA487C0E886}"/>
+                <a16:creationId xmlns:a16="http://schemas.microsoft.com/office/drawing/2014/main" id="{B20923D3-BEA9-42E9-8966-E509B80A221C}"/>
               </a:ext>
             </a:extLst>
           </p:cNvPr>
@@ -5235,7 +5235,7 @@
           <p:cNvPr id="6" name="bullet-1">
             <a:extLst xmlns:a="http://schemas.openxmlformats.org/drawingml/2006/main">
               <a:ext uri="{FF2B5EF4-FFF2-40B4-BE49-F238E27FC236}">
-                <a16:creationId xmlns:a16="http://schemas.microsoft.com/office/drawing/2014/main" id="{449537DB-9238-4C87-9C06-E72AB61CE4D7}"/>
+                <a16:creationId xmlns:a16="http://schemas.microsoft.com/office/drawing/2014/main" id="{BA8ACA8B-67FB-43E2-B692-553BAE998471}"/>
               </a:ext>
             </a:extLst>
           </p:cNvPr>
@@ -5266,7 +5266,7 @@
           <p:cNvPr id="7" name="bullet-number-1">
             <a:extLst xmlns:a="http://schemas.openxmlformats.org/drawingml/2006/main">
               <a:ext uri="{FF2B5EF4-FFF2-40B4-BE49-F238E27FC236}">
-                <a16:creationId xmlns:a16="http://schemas.microsoft.com/office/drawing/2014/main" id="{180ED835-3BE8-4CBB-942F-539C88E3DF9E}"/>
+                <a16:creationId xmlns:a16="http://schemas.microsoft.com/office/drawing/2014/main" id="{154FBF32-CC4D-4FE2-9EC1-44B98BE0EBA0}"/>
               </a:ext>
             </a:extLst>
           </p:cNvPr>
@@ -5316,7 +5316,7 @@
           <p:cNvPr id="8" name="bullet-copy-1">
             <a:extLst xmlns:a="http://schemas.openxmlformats.org/drawingml/2006/main">
               <a:ext uri="{FF2B5EF4-FFF2-40B4-BE49-F238E27FC236}">
-                <a16:creationId xmlns:a16="http://schemas.microsoft.com/office/drawing/2014/main" id="{7FB6BBE9-7FC7-4443-92E5-F762BECC39DA}"/>
+                <a16:creationId xmlns:a16="http://schemas.microsoft.com/office/drawing/2014/main" id="{69EDD73D-4B8B-4F0E-A457-344121A85341}"/>
               </a:ext>
             </a:extLst>
           </p:cNvPr>
@@ -5366,7 +5366,7 @@
           <p:cNvPr id="9" name="bullet-2">
             <a:extLst xmlns:a="http://schemas.openxmlformats.org/drawingml/2006/main">
               <a:ext uri="{FF2B5EF4-FFF2-40B4-BE49-F238E27FC236}">
-                <a16:creationId xmlns:a16="http://schemas.microsoft.com/office/drawing/2014/main" id="{31EE5325-F57A-49AE-AA88-BD5FAD97B64C}"/>
+                <a16:creationId xmlns:a16="http://schemas.microsoft.com/office/drawing/2014/main" id="{73AAE268-FCE6-4D55-9199-3EF6A40F9A79}"/>
               </a:ext>
             </a:extLst>
           </p:cNvPr>
@@ -5397,7 +5397,7 @@
           <p:cNvPr id="10" name="bullet-number-2">
             <a:extLst xmlns:a="http://schemas.openxmlformats.org/drawingml/2006/main">
               <a:ext uri="{FF2B5EF4-FFF2-40B4-BE49-F238E27FC236}">
-                <a16:creationId xmlns:a16="http://schemas.microsoft.com/office/drawing/2014/main" id="{4D66F5BA-9E86-45A1-B6BE-89F696D8E95F}"/>
+                <a16:creationId xmlns:a16="http://schemas.microsoft.com/office/drawing/2014/main" id="{1154C913-DF04-422D-B3CF-680EB947A731}"/>
               </a:ext>
             </a:extLst>
           </p:cNvPr>
@@ -5447,7 +5447,7 @@
           <p:cNvPr id="11" name="bullet-copy-2">
             <a:extLst xmlns:a="http://schemas.openxmlformats.org/drawingml/2006/main">
               <a:ext uri="{FF2B5EF4-FFF2-40B4-BE49-F238E27FC236}">
-                <a16:creationId xmlns:a16="http://schemas.microsoft.com/office/drawing/2014/main" id="{1F882DEA-1717-4068-A80B-4AB28D7A96F6}"/>
+                <a16:creationId xmlns:a16="http://schemas.microsoft.com/office/drawing/2014/main" id="{875BF46C-A81E-47C0-BC47-C947D771DCC7}"/>
               </a:ext>
             </a:extLst>
           </p:cNvPr>
@@ -5487,7 +5487,7 @@
                   <a:srgbClr val="16343A"/>
                 </a:solidFill>
               </a:rPr>
-              <a:t>They also consider how easily a material can be marked, cut, pinned, pressed and sewn.</a:t>
+              <a:t>A thick material may offer body but be harder to fold accurately.</a:t>
             </a:r>
           </a:p>
         </p:txBody>
@@ -5497,7 +5497,7 @@
           <p:cNvPr id="12" name="bullet-3">
             <a:extLst xmlns:a="http://schemas.openxmlformats.org/drawingml/2006/main">
               <a:ext uri="{FF2B5EF4-FFF2-40B4-BE49-F238E27FC236}">
-                <a16:creationId xmlns:a16="http://schemas.microsoft.com/office/drawing/2014/main" id="{D0B11764-07F8-40E3-8C03-8689BE07C071}"/>
+                <a16:creationId xmlns:a16="http://schemas.microsoft.com/office/drawing/2014/main" id="{D9861A27-9675-4828-8D31-6DE9F3DC7B2F}"/>
               </a:ext>
             </a:extLst>
           </p:cNvPr>
@@ -5528,7 +5528,7 @@
           <p:cNvPr id="13" name="bullet-number-3">
             <a:extLst xmlns:a="http://schemas.openxmlformats.org/drawingml/2006/main">
               <a:ext uri="{FF2B5EF4-FFF2-40B4-BE49-F238E27FC236}">
-                <a16:creationId xmlns:a16="http://schemas.microsoft.com/office/drawing/2014/main" id="{7B14F3F1-1BA8-477C-9E7E-2B14CF650992}"/>
+                <a16:creationId xmlns:a16="http://schemas.microsoft.com/office/drawing/2014/main" id="{40D45131-7301-4B3B-B934-F55BEB961B2C}"/>
               </a:ext>
             </a:extLst>
           </p:cNvPr>
@@ -5578,7 +5578,7 @@
           <p:cNvPr id="14" name="bullet-copy-3">
             <a:extLst xmlns:a="http://schemas.openxmlformats.org/drawingml/2006/main">
               <a:ext uri="{FF2B5EF4-FFF2-40B4-BE49-F238E27FC236}">
-                <a16:creationId xmlns:a16="http://schemas.microsoft.com/office/drawing/2014/main" id="{FAF5CF70-C6E7-4A24-9ECC-9BD2C9486F3C}"/>
+                <a16:creationId xmlns:a16="http://schemas.microsoft.com/office/drawing/2014/main" id="{C276EEA7-4D61-4C37-B109-9D6DD9C9133F}"/>
               </a:ext>
             </a:extLst>
           </p:cNvPr>
@@ -5618,7 +5618,7 @@
                   <a:srgbClr val="16343A"/>
                 </a:solidFill>
               </a:rPr>
-              <a:t>Record the actual materials available for your project and justify choices using observed properties.</a:t>
+              <a:t>Give more importance to properties that directly affect function and safe construction, then explain why the chosen balance suits the brief.</a:t>
             </a:r>
           </a:p>
         </p:txBody>
@@ -5626,7 +5626,7 @@
     </p:spTree>
     <p:extLst>
       <p:ext uri="{BB962C8B-B14F-4D97-AF65-F5344CB8AC3E}">
-        <p14:creationId xmlns:p14="http://schemas.microsoft.com/office/powerpoint/2010/main" val="1551731096"/>
+        <p14:creationId xmlns:p14="http://schemas.microsoft.com/office/powerpoint/2010/main" val="1711651664"/>
       </p:ext>
     </p:extLst>
   </p:cSld>
@@ -5657,7 +5657,7 @@
           <p:cNvPr id="6" name="closing-rule">
             <a:extLst xmlns:a="http://schemas.openxmlformats.org/drawingml/2006/main">
               <a:ext uri="{FF2B5EF4-FFF2-40B4-BE49-F238E27FC236}">
-                <a16:creationId xmlns:a16="http://schemas.microsoft.com/office/drawing/2014/main" id="{23B2083E-6052-476E-8869-726DFEC06F45}"/>
+                <a16:creationId xmlns:a16="http://schemas.microsoft.com/office/drawing/2014/main" id="{F24726C1-5383-4269-8885-9F9F4701FEBE}"/>
               </a:ext>
             </a:extLst>
           </p:cNvPr>
@@ -5688,7 +5688,7 @@
           <p:cNvPr id="2" name="closing-kicker">
             <a:extLst xmlns:a="http://schemas.openxmlformats.org/drawingml/2006/main">
               <a:ext uri="{FF2B5EF4-FFF2-40B4-BE49-F238E27FC236}">
-                <a16:creationId xmlns:a16="http://schemas.microsoft.com/office/drawing/2014/main" id="{BA159C62-7452-488D-A310-426240256F94}"/>
+                <a16:creationId xmlns:a16="http://schemas.microsoft.com/office/drawing/2014/main" id="{247B07BF-3C66-4070-867E-7F0657777341}"/>
               </a:ext>
             </a:extLst>
           </p:cNvPr>
@@ -5738,7 +5738,7 @@
           <p:cNvPr id="3" name="closing-title">
             <a:extLst xmlns:a="http://schemas.openxmlformats.org/drawingml/2006/main">
               <a:ext uri="{FF2B5EF4-FFF2-40B4-BE49-F238E27FC236}">
-                <a16:creationId xmlns:a16="http://schemas.microsoft.com/office/drawing/2014/main" id="{31D86A5D-55B5-4047-B54B-1F96B69FE4F1}"/>
+                <a16:creationId xmlns:a16="http://schemas.microsoft.com/office/drawing/2014/main" id="{278B75FC-4DA8-41C3-80CF-D4C1291CE236}"/>
               </a:ext>
             </a:extLst>
           </p:cNvPr>
@@ -5788,7 +5788,7 @@
           <p:cNvPr id="4" name="closing-copy">
             <a:extLst xmlns:a="http://schemas.openxmlformats.org/drawingml/2006/main">
               <a:ext uri="{FF2B5EF4-FFF2-40B4-BE49-F238E27FC236}">
-                <a16:creationId xmlns:a16="http://schemas.microsoft.com/office/drawing/2014/main" id="{A61292C9-8FC5-43B0-86F8-5B6455591BD0}"/>
+                <a16:creationId xmlns:a16="http://schemas.microsoft.com/office/drawing/2014/main" id="{4CB3BB0A-FAC4-4C02-88C8-65B3EFADDF15}"/>
               </a:ext>
             </a:extLst>
           </p:cNvPr>
@@ -5862,7 +5862,7 @@
                   <a:srgbClr val="E6F2EF"/>
                 </a:solidFill>
               </a:rPr>
-              <a:t>3. Continue Project Activity 2 and keep authentic evidence.</a:t>
+              <a:t>3. Continue the Textile sample investigation and keep authentic evidence.</a:t>
             </a:r>
           </a:p>
         </p:txBody>
@@ -5872,7 +5872,7 @@
           <p:cNvPr id="5" name="closing-boundary">
             <a:extLst xmlns:a="http://schemas.openxmlformats.org/drawingml/2006/main">
               <a:ext uri="{FF2B5EF4-FFF2-40B4-BE49-F238E27FC236}">
-                <a16:creationId xmlns:a16="http://schemas.microsoft.com/office/drawing/2014/main" id="{30474A61-06EA-4C37-ADA6-7D2991D14B7B}"/>
+                <a16:creationId xmlns:a16="http://schemas.microsoft.com/office/drawing/2014/main" id="{D42C6289-51BE-4257-87A5-6AAD01EC97B7}"/>
               </a:ext>
             </a:extLst>
           </p:cNvPr>
@@ -5920,7 +5920,7 @@
     </p:spTree>
     <p:extLst>
       <p:ext uri="{BB962C8B-B14F-4D97-AF65-F5344CB8AC3E}">
-        <p14:creationId xmlns:p14="http://schemas.microsoft.com/office/powerpoint/2010/main" val="1651994993"/>
+        <p14:creationId xmlns:p14="http://schemas.microsoft.com/office/powerpoint/2010/main" val="173253215"/>
       </p:ext>
     </p:extLst>
   </p:cSld>
